--- a/REKN.pptx
+++ b/REKN.pptx
@@ -14,7 +14,7 @@
     <p:sldId id="401" r:id="rId5"/>
     <p:sldId id="491" r:id="rId6"/>
     <p:sldId id="455" r:id="rId7"/>
-    <p:sldId id="492" r:id="rId8"/>
+    <p:sldId id="503" r:id="rId8"/>
     <p:sldId id="493" r:id="rId9"/>
     <p:sldId id="494" r:id="rId10"/>
     <p:sldId id="497" r:id="rId11"/>
@@ -227,7 +227,7 @@
           <a:p>
             <a:fld id="{A78133E2-FBBC-4C61-A5C0-7062D0A259CE}" type="datetimeFigureOut">
               <a:rPr lang="en-US" smtClean="0"/>
-              <a:t>3/30/2023</a:t>
+              <a:t>4/1/2024</a:t>
             </a:fld>
             <a:endParaRPr lang="en-US"/>
           </a:p>
@@ -707,7 +707,7 @@
           <a:p>
             <a:fld id="{580C285D-C318-479F-93A6-892FDA74F1A2}" type="datetimeFigureOut">
               <a:rPr lang="en-US" smtClean="0"/>
-              <a:t>3/30/2023</a:t>
+              <a:t>4/1/2024</a:t>
             </a:fld>
             <a:endParaRPr lang="en-US"/>
           </a:p>
@@ -875,7 +875,7 @@
           <a:p>
             <a:fld id="{580C285D-C318-479F-93A6-892FDA74F1A2}" type="datetimeFigureOut">
               <a:rPr lang="en-US" smtClean="0"/>
-              <a:t>3/30/2023</a:t>
+              <a:t>4/1/2024</a:t>
             </a:fld>
             <a:endParaRPr lang="en-US"/>
           </a:p>
@@ -1053,7 +1053,7 @@
           <a:p>
             <a:fld id="{580C285D-C318-479F-93A6-892FDA74F1A2}" type="datetimeFigureOut">
               <a:rPr lang="en-US" smtClean="0"/>
-              <a:t>3/30/2023</a:t>
+              <a:t>4/1/2024</a:t>
             </a:fld>
             <a:endParaRPr lang="en-US"/>
           </a:p>
@@ -1221,7 +1221,7 @@
           <a:p>
             <a:fld id="{580C285D-C318-479F-93A6-892FDA74F1A2}" type="datetimeFigureOut">
               <a:rPr lang="en-US" smtClean="0"/>
-              <a:t>3/30/2023</a:t>
+              <a:t>4/1/2024</a:t>
             </a:fld>
             <a:endParaRPr lang="en-US"/>
           </a:p>
@@ -1466,7 +1466,7 @@
           <a:p>
             <a:fld id="{580C285D-C318-479F-93A6-892FDA74F1A2}" type="datetimeFigureOut">
               <a:rPr lang="en-US" smtClean="0"/>
-              <a:t>3/30/2023</a:t>
+              <a:t>4/1/2024</a:t>
             </a:fld>
             <a:endParaRPr lang="en-US"/>
           </a:p>
@@ -1695,7 +1695,7 @@
           <a:p>
             <a:fld id="{580C285D-C318-479F-93A6-892FDA74F1A2}" type="datetimeFigureOut">
               <a:rPr lang="en-US" smtClean="0"/>
-              <a:t>3/30/2023</a:t>
+              <a:t>4/1/2024</a:t>
             </a:fld>
             <a:endParaRPr lang="en-US"/>
           </a:p>
@@ -2059,7 +2059,7 @@
           <a:p>
             <a:fld id="{580C285D-C318-479F-93A6-892FDA74F1A2}" type="datetimeFigureOut">
               <a:rPr lang="en-US" smtClean="0"/>
-              <a:t>3/30/2023</a:t>
+              <a:t>4/1/2024</a:t>
             </a:fld>
             <a:endParaRPr lang="en-US"/>
           </a:p>
@@ -2176,7 +2176,7 @@
           <a:p>
             <a:fld id="{580C285D-C318-479F-93A6-892FDA74F1A2}" type="datetimeFigureOut">
               <a:rPr lang="en-US" smtClean="0"/>
-              <a:t>3/30/2023</a:t>
+              <a:t>4/1/2024</a:t>
             </a:fld>
             <a:endParaRPr lang="en-US"/>
           </a:p>
@@ -2271,7 +2271,7 @@
           <a:p>
             <a:fld id="{580C285D-C318-479F-93A6-892FDA74F1A2}" type="datetimeFigureOut">
               <a:rPr lang="en-US" smtClean="0"/>
-              <a:t>3/30/2023</a:t>
+              <a:t>4/1/2024</a:t>
             </a:fld>
             <a:endParaRPr lang="en-US"/>
           </a:p>
@@ -2546,7 +2546,7 @@
           <a:p>
             <a:fld id="{580C285D-C318-479F-93A6-892FDA74F1A2}" type="datetimeFigureOut">
               <a:rPr lang="en-US" smtClean="0"/>
-              <a:t>3/30/2023</a:t>
+              <a:t>4/1/2024</a:t>
             </a:fld>
             <a:endParaRPr lang="en-US"/>
           </a:p>
@@ -2798,7 +2798,7 @@
           <a:p>
             <a:fld id="{580C285D-C318-479F-93A6-892FDA74F1A2}" type="datetimeFigureOut">
               <a:rPr lang="en-US" smtClean="0"/>
-              <a:t>3/30/2023</a:t>
+              <a:t>4/1/2024</a:t>
             </a:fld>
             <a:endParaRPr lang="en-US"/>
           </a:p>
@@ -3009,7 +3009,7 @@
           <a:p>
             <a:fld id="{580C285D-C318-479F-93A6-892FDA74F1A2}" type="datetimeFigureOut">
               <a:rPr lang="en-US" smtClean="0"/>
-              <a:t>3/30/2023</a:t>
+              <a:t>4/1/2024</a:t>
             </a:fld>
             <a:endParaRPr lang="en-US"/>
           </a:p>
@@ -3952,7 +3952,7 @@
                 <a16:creationId xmlns:a16="http://schemas.microsoft.com/office/drawing/2014/main" id="{D4771268-CB57-404A-9271-370EB28F6090}"/>
               </a:ext>
               <a:ext uri="{C183D7F6-B498-43B3-948B-1728B52AA6E4}">
-                <adec:decorative xmlns="" xmlns:adec="http://schemas.microsoft.com/office/drawing/2017/decorative" val="1"/>
+                <adec:decorative xmlns:adec="http://schemas.microsoft.com/office/drawing/2017/decorative" val="1"/>
               </a:ext>
             </a:extLst>
           </p:cNvPr>
@@ -4406,15 +4406,7 @@
             </a:pPr>
             <a:r>
               <a:rPr lang="en-US" dirty="0"/>
-              <a:t>Run the model with maximum </a:t>
-            </a:r>
-            <a:r>
-              <a:rPr lang="en-US" dirty="0" smtClean="0"/>
-              <a:t>proposed commercial </a:t>
-            </a:r>
-            <a:r>
-              <a:rPr lang="en-US" dirty="0"/>
-              <a:t>harvest of females: 210,000 females harvested per year</a:t>
+              <a:t>Run the model with maximum proposed commercial harvest of females: 210,000 females harvested per year</a:t>
             </a:r>
           </a:p>
           <a:p>
@@ -4424,19 +4416,7 @@
             </a:pPr>
             <a:r>
               <a:rPr lang="en-US" dirty="0"/>
-              <a:t>Run the model with </a:t>
-            </a:r>
-            <a:r>
-              <a:rPr lang="en-US" dirty="0" smtClean="0"/>
-              <a:t>1 </a:t>
-            </a:r>
-            <a:r>
-              <a:rPr lang="en-US" dirty="0"/>
-              <a:t>million females harvested each </a:t>
-            </a:r>
-            <a:r>
-              <a:rPr lang="en-US" dirty="0" smtClean="0"/>
-              <a:t>year (much higher than max proposed harvest)</a:t>
+              <a:t>Run the model with 1 million females harvested each year (much higher than max proposed harvest)</a:t>
             </a:r>
           </a:p>
           <a:p>
@@ -4445,7 +4425,7 @@
               <a:buAutoNum type="arabicPeriod"/>
             </a:pPr>
             <a:r>
-              <a:rPr lang="en-US" dirty="0" smtClean="0"/>
+              <a:rPr lang="en-US" dirty="0"/>
               <a:t>What is the maximum sustainable harvest rate (number of females harvested per year) in this population? Note that you need to define what “sustainable” means here!</a:t>
             </a:r>
           </a:p>
@@ -4455,10 +4435,9 @@
               <a:buAutoNum type="arabicPeriod"/>
             </a:pPr>
             <a:r>
-              <a:rPr lang="en-US" dirty="0" smtClean="0"/>
+              <a:rPr lang="en-US" dirty="0"/>
               <a:t>Keeping the same harvest rate (maximum harvest rate identified above), run the model again with the average recruitment parameter cut in half. Is the population still sustainable?</a:t>
             </a:r>
-            <a:endParaRPr lang="en-US" dirty="0"/>
           </a:p>
           <a:p>
             <a:pPr marL="0" indent="0">
@@ -4472,13 +4451,8 @@
             </a:pPr>
             <a:r>
               <a:rPr lang="en-US" i="1" dirty="0"/>
-              <a:t>Please work together to describe the results of your scenario tests. Do you think this population is likely to be resilient to the maximum allowable female harvest rates? Why or why not</a:t>
-            </a:r>
-            <a:r>
-              <a:rPr lang="en-US" i="1" dirty="0" smtClean="0"/>
-              <a:t>?</a:t>
-            </a:r>
-            <a:endParaRPr lang="en-US" i="1" dirty="0"/>
+              <a:t>Please work together to describe the results of your scenario tests. Do you think this population is likely to be resilient to the maximum allowable female harvest rates? Why or why not?</a:t>
+            </a:r>
           </a:p>
         </p:txBody>
       </p:sp>
@@ -4652,10 +4626,6 @@
             <a:br>
               <a:rPr lang="en-US" sz="3600" dirty="0"/>
             </a:br>
-            <a:r>
-              <a:rPr lang="en-US" sz="3600" dirty="0"/>
-              <a:t/>
-            </a:r>
             <a:br>
               <a:rPr lang="en-US" sz="3600" dirty="0"/>
             </a:br>
@@ -5857,7 +5827,7 @@
           <a:p>
             <a:r>
               <a:rPr lang="en-US" dirty="0"/>
-              <a:t>Let’s return to those REKN/HSC relationships…</a:t>
+              <a:t>Key REKN/HSC relationships…</a:t>
             </a:r>
           </a:p>
         </p:txBody>
@@ -5964,35 +5934,6 @@
           <a:chExt cx="0" cy="0"/>
         </a:xfrm>
       </p:grpSpPr>
-      <p:pic>
-        <p:nvPicPr>
-          <p:cNvPr id="5" name="Picture 4">
-            <a:extLst>
-              <a:ext uri="{FF2B5EF4-FFF2-40B4-BE49-F238E27FC236}">
-                <a16:creationId xmlns:a16="http://schemas.microsoft.com/office/drawing/2014/main" id="{14B91C27-0645-23E1-708B-AA8BAC74DD97}"/>
-              </a:ext>
-            </a:extLst>
-          </p:cNvPr>
-          <p:cNvPicPr>
-            <a:picLocks noChangeAspect="1"/>
-          </p:cNvPicPr>
-          <p:nvPr/>
-        </p:nvPicPr>
-        <p:blipFill rotWithShape="1">
-          <a:blip r:embed="rId2"/>
-          <a:srcRect t="22243"/>
-          <a:stretch/>
-        </p:blipFill>
-        <p:spPr>
-          <a:xfrm>
-            <a:off x="2830881" y="4507136"/>
-            <a:ext cx="5800847" cy="1461611"/>
-          </a:xfrm>
-          <a:prstGeom prst="rect">
-            <a:avLst/>
-          </a:prstGeom>
-        </p:spPr>
-      </p:pic>
       <p:sp>
         <p:nvSpPr>
           <p:cNvPr id="2" name="Title 1">
@@ -6107,10 +6048,9 @@
             <a:p>
               <a:pPr algn="ctr"/>
               <a:r>
-                <a:rPr lang="en-US" dirty="0" smtClean="0"/>
+                <a:rPr lang="en-US" dirty="0"/>
                 <a:t>Juveniles</a:t>
               </a:r>
-              <a:endParaRPr lang="en-US" dirty="0"/>
             </a:p>
           </p:txBody>
         </p:sp>
@@ -6201,10 +6141,9 @@
             <a:p>
               <a:pPr algn="ctr"/>
               <a:r>
-                <a:rPr lang="en-US" dirty="0" smtClean="0"/>
+                <a:rPr lang="en-US" dirty="0"/>
                 <a:t>Adults</a:t>
               </a:r>
-              <a:endParaRPr lang="en-US" dirty="0"/>
             </a:p>
           </p:txBody>
         </p:sp>
@@ -6268,11 +6207,11 @@
           <a:lstStyle/>
           <a:p>
             <a:r>
-              <a:rPr lang="el-GR" sz="3200" dirty="0" smtClean="0"/>
+              <a:rPr lang="el-GR" sz="3200" dirty="0"/>
               <a:t>ϕ</a:t>
             </a:r>
             <a:r>
-              <a:rPr lang="en-US" sz="3200" baseline="30000" dirty="0" smtClean="0"/>
+              <a:rPr lang="en-US" sz="3200" baseline="30000" dirty="0"/>
               <a:t>J</a:t>
             </a:r>
             <a:endParaRPr lang="en-US" baseline="30000" dirty="0"/>
@@ -6344,7 +6283,7 @@
           <a:lstStyle/>
           <a:p>
             <a:r>
-              <a:rPr lang="el-GR" sz="3200" dirty="0" smtClean="0"/>
+              <a:rPr lang="el-GR" sz="3200" dirty="0"/>
               <a:t>ϕ</a:t>
             </a:r>
             <a:r>
@@ -6419,7 +6358,7 @@
           <a:lstStyle/>
           <a:p>
             <a:r>
-              <a:rPr lang="en-US" sz="3200" i="1" dirty="0" err="1" smtClean="0"/>
+              <a:rPr lang="en-US" sz="3200" i="1" dirty="0" err="1"/>
               <a:t>f</a:t>
             </a:r>
             <a:r>
@@ -6430,91 +6369,46 @@
           </a:p>
         </p:txBody>
       </p:sp>
+      <p:pic>
+        <p:nvPicPr>
+          <p:cNvPr id="3" name="Picture 2">
+            <a:extLst>
+              <a:ext uri="{FF2B5EF4-FFF2-40B4-BE49-F238E27FC236}">
+                <a16:creationId xmlns:a16="http://schemas.microsoft.com/office/drawing/2014/main" id="{042FECAC-4E70-B72C-E358-F2F8A3746A05}"/>
+              </a:ext>
+            </a:extLst>
+          </p:cNvPr>
+          <p:cNvPicPr>
+            <a:picLocks noChangeAspect="1"/>
+          </p:cNvPicPr>
+          <p:nvPr/>
+        </p:nvPicPr>
+        <p:blipFill>
+          <a:blip r:embed="rId2"/>
+          <a:stretch>
+            <a:fillRect/>
+          </a:stretch>
+        </p:blipFill>
+        <p:spPr>
+          <a:xfrm>
+            <a:off x="2965827" y="4456984"/>
+            <a:ext cx="5362588" cy="1770505"/>
+          </a:xfrm>
+          <a:prstGeom prst="rect">
+            <a:avLst/>
+          </a:prstGeom>
+        </p:spPr>
+      </p:pic>
     </p:spTree>
     <p:extLst>
       <p:ext uri="{BB962C8B-B14F-4D97-AF65-F5344CB8AC3E}">
-        <p14:creationId xmlns:p14="http://schemas.microsoft.com/office/powerpoint/2010/main" val="1926706461"/>
+        <p14:creationId xmlns:p14="http://schemas.microsoft.com/office/powerpoint/2010/main" val="1582873200"/>
       </p:ext>
     </p:extLst>
   </p:cSld>
   <p:clrMapOvr>
     <a:masterClrMapping/>
   </p:clrMapOvr>
-  <p:timing>
-    <p:tnLst>
-      <p:par>
-        <p:cTn id="1" dur="indefinite" restart="never" nodeType="tmRoot">
-          <p:childTnLst>
-            <p:seq concurrent="1" nextAc="seek">
-              <p:cTn id="2" dur="indefinite" nodeType="mainSeq">
-                <p:childTnLst>
-                  <p:par>
-                    <p:cTn id="3" fill="hold">
-                      <p:stCondLst>
-                        <p:cond delay="indefinite"/>
-                      </p:stCondLst>
-                      <p:childTnLst>
-                        <p:par>
-                          <p:cTn id="4" fill="hold">
-                            <p:stCondLst>
-                              <p:cond delay="0"/>
-                            </p:stCondLst>
-                            <p:childTnLst>
-                              <p:par>
-                                <p:cTn id="5" presetID="1" presetClass="entr" presetSubtype="0" fill="hold" nodeType="clickEffect">
-                                  <p:stCondLst>
-                                    <p:cond delay="0"/>
-                                  </p:stCondLst>
-                                  <p:childTnLst>
-                                    <p:set>
-                                      <p:cBhvr>
-                                        <p:cTn id="6" dur="1" fill="hold">
-                                          <p:stCondLst>
-                                            <p:cond delay="0"/>
-                                          </p:stCondLst>
-                                        </p:cTn>
-                                        <p:tgtEl>
-                                          <p:spTgt spid="5"/>
-                                        </p:tgtEl>
-                                        <p:attrNameLst>
-                                          <p:attrName>style.visibility</p:attrName>
-                                        </p:attrNameLst>
-                                      </p:cBhvr>
-                                      <p:to>
-                                        <p:strVal val="visible"/>
-                                      </p:to>
-                                    </p:set>
-                                  </p:childTnLst>
-                                </p:cTn>
-                              </p:par>
-                            </p:childTnLst>
-                          </p:cTn>
-                        </p:par>
-                      </p:childTnLst>
-                    </p:cTn>
-                  </p:par>
-                </p:childTnLst>
-              </p:cTn>
-              <p:prevCondLst>
-                <p:cond evt="onPrev" delay="0">
-                  <p:tgtEl>
-                    <p:sldTgt/>
-                  </p:tgtEl>
-                </p:cond>
-              </p:prevCondLst>
-              <p:nextCondLst>
-                <p:cond evt="onNext" delay="0">
-                  <p:tgtEl>
-                    <p:sldTgt/>
-                  </p:tgtEl>
-                </p:cond>
-              </p:nextCondLst>
-            </p:seq>
-          </p:childTnLst>
-        </p:cTn>
-      </p:par>
-    </p:tnLst>
-  </p:timing>
 </p:sld>
 </file>
 
